--- a/storeinsight/public/PackageTemplate.pptx
+++ b/storeinsight/public/PackageTemplate.pptx
@@ -3998,7 +3998,7 @@
           <p:nvPr>
             <p:extLst>
               <p:ext uri="{D42A27DB-BD31-4B8C-83A1-F6EECF244321}">
-                <p14:modId xmlns:p14="http://schemas.microsoft.com/office/powerpoint/2010/main" val="628581190"/>
+                <p14:modId xmlns:p14="http://schemas.microsoft.com/office/powerpoint/2010/main" val="2723261487"/>
               </p:ext>
             </p:extLst>
           </p:nvPr>
@@ -4192,7 +4192,7 @@
                           <a:cs typeface="Avenir"/>
                           <a:sym typeface="Avenir"/>
                         </a:rPr>
-                        <a:t>{{3YMUL}}X</a:t>
+                        <a:t>{{3YMUL}}</a:t>
                       </a:r>
                       <a:endParaRPr lang="en-US" sz="1100" dirty="0"/>
                     </a:p>
@@ -4403,7 +4403,7 @@
                           <a:cs typeface="Avenir"/>
                           <a:sym typeface="Avenir"/>
                         </a:rPr>
-                        <a:t>{{5YMUL}}X</a:t>
+                        <a:t>{{5YMUL}}</a:t>
                       </a:r>
                       <a:endParaRPr lang="en-US" sz="1100" dirty="0"/>
                     </a:p>
@@ -4614,7 +4614,19 @@
                           <a:cs typeface="Avenir"/>
                           <a:sym typeface="Avenir"/>
                         </a:rPr>
-                        <a:t>{{7YMUL}}X</a:t>
+                        <a:t>{{</a:t>
+                      </a:r>
+                      <a:r>
+                        <a:rPr lang="en-US" sz="2700">
+                          <a:solidFill>
+                            <a:srgbClr val="FFFFFF"/>
+                          </a:solidFill>
+                          <a:latin typeface="Avenir"/>
+                          <a:ea typeface="Avenir"/>
+                          <a:cs typeface="Avenir"/>
+                          <a:sym typeface="Avenir"/>
+                        </a:rPr>
+                        <a:t>7YMUL}}</a:t>
                       </a:r>
                       <a:endParaRPr lang="en-US" sz="1100" dirty="0"/>
                     </a:p>
@@ -4720,15 +4732,15 @@
         </p:nvSpPr>
         <p:spPr>
           <a:xfrm>
-            <a:off x="4092340" y="7100506"/>
-            <a:ext cx="5658069" cy="538991"/>
+            <a:off x="3124200" y="7100506"/>
+            <a:ext cx="6061225" cy="379463"/>
           </a:xfrm>
           <a:prstGeom prst="rect">
             <a:avLst/>
           </a:prstGeom>
         </p:spPr>
         <p:txBody>
-          <a:bodyPr lIns="0" tIns="0" rIns="0" bIns="0" rtlCol="0" anchor="t">
+          <a:bodyPr wrap="square" lIns="0" tIns="0" rIns="0" bIns="0" rtlCol="0" anchor="t">
             <a:spAutoFit/>
           </a:bodyPr>
           <a:lstStyle/>
@@ -4739,7 +4751,7 @@
               </a:lnSpc>
             </a:pPr>
             <a:r>
-              <a:rPr lang="en-US" sz="2291" b="1" i="1">
+              <a:rPr lang="en-US" sz="2291" b="1" i="1" dirty="0">
                 <a:solidFill>
                   <a:srgbClr val="D7DFE5"/>
                 </a:solidFill>
@@ -4748,7 +4760,7 @@
                 <a:cs typeface="Avenir Bold Italics"/>
                 <a:sym typeface="Avenir Bold Italics"/>
               </a:rPr>
-              <a:t>Location: Primary Market in Carolinas </a:t>
+              <a:t>Location: Primary Market in {{REGION}} </a:t>
             </a:r>
           </a:p>
         </p:txBody>
